--- a/data/generated_documents/Sales/Sales_Document_060.pptx
+++ b/data/generated_documents/Sales/Sales_Document_060.pptx
@@ -3140,7 +3140,7 @@
           <a:lstStyle/>
           <a:p>
             <a:r>
-              <a:t>Generated: October 21, 2026</a:t>
+              <a:t>Generated: October 28, 2026</a:t>
             </a:r>
           </a:p>
           <a:p>
